--- a/dataset/guides_final/ACC/manual/IT-ACC-003-M_MFA 인증 오류 처리 매뉴얼.pptx
+++ b/dataset/guides_final/ACC/manual/IT-ACC-003-M_MFA 인증 오류 처리 매뉴얼.pptx
@@ -34294,7 +34294,7 @@
                 <a:ea typeface="Malgun Gothic"/>
                 <a:cs typeface="Malgun Gothic"/>
               </a:rPr>
-              <a:t>티켓: MFA 초기화가 필요한 건(인증 앱 반복, 예전 휴대폰과 번호가 모두 없음). 본인 확인 L2 후 처리하고 RDY → IP → FIN → CLS 으로 관리한다.</a:t>
+              <a:t>티켓: MFA 초기화가 필요한 건(인증 앱 반복, 예전 휴대폰과 번호가 모두 없음). 본인 확인 L2 후 처리하고 RDY → WIP → FIN → CLS 으로 관리한다.</a:t>
             </a:r>
           </a:p>
         </p:txBody>

--- a/dataset/guides_final/ACC/manual/IT-ACC-003-M_MFA 인증 오류 처리 매뉴얼.pptx
+++ b/dataset/guides_final/ACC/manual/IT-ACC-003-M_MFA 인증 오류 처리 매뉴얼.pptx
@@ -3240,7 +3240,7 @@
                 <a:ea typeface="Malgun Gothic"/>
                 <a:cs typeface="Malgun Gothic"/>
               </a:rPr>
-              <a:t>한화시스템 ICT IT 담당자 매뉴얼 · 계정·로그인</a:t>
+              <a:t>가상 ICT 기업 IT 담당자 매뉴얼 · 계정·로그인</a:t>
             </a:r>
           </a:p>
         </p:txBody>
@@ -3519,7 +3519,7 @@
                 <a:ea typeface="Malgun Gothic"/>
                 <a:cs typeface="Malgun Gothic"/>
               </a:rPr>
-              <a:t>© HANWHA SYSTEMS ICT · IT-ACC-003-M · 사내 제한</a:t>
+              <a:t>© 가상 ICT 기업 · IT-ACC-003-M · 사내 제한</a:t>
             </a:r>
           </a:p>
         </p:txBody>
@@ -3767,7 +3767,7 @@
                 <a:ea typeface="Malgun Gothic"/>
                 <a:cs typeface="Malgun Gothic"/>
               </a:rPr>
-              <a:t>© HANWHA SYSTEMS ICT · IT-ACC-003-M · 사내 제한</a:t>
+              <a:t>© 가상 ICT 기업 · IT-ACC-003-M · 사내 제한</a:t>
             </a:r>
           </a:p>
         </p:txBody>
@@ -6323,7 +6323,7 @@
                 <a:ea typeface="Malgun Gothic"/>
                 <a:cs typeface="Malgun Gothic"/>
               </a:rPr>
-              <a:t>© HANWHA SYSTEMS ICT · IT-ACC-003-M · 사내 제한</a:t>
+              <a:t>© 가상 ICT 기업 · IT-ACC-003-M · 사내 제한</a:t>
             </a:r>
           </a:p>
         </p:txBody>
@@ -7248,7 +7248,7 @@
                 <a:ea typeface="Malgun Gothic"/>
                 <a:cs typeface="Malgun Gothic"/>
               </a:rPr>
-              <a:t>© HANWHA SYSTEMS ICT · IT-ACC-003-M · 사내 제한</a:t>
+              <a:t>© 가상 ICT 기업 · IT-ACC-003-M · 사내 제한</a:t>
             </a:r>
           </a:p>
         </p:txBody>
@@ -10352,7 +10352,7 @@
                 <a:ea typeface="Malgun Gothic"/>
                 <a:cs typeface="Malgun Gothic"/>
               </a:rPr>
-              <a:t>© HANWHA SYSTEMS ICT · IT-ACC-003-M · 사내 제한</a:t>
+              <a:t>© 가상 ICT 기업 · IT-ACC-003-M · 사내 제한</a:t>
             </a:r>
           </a:p>
         </p:txBody>
@@ -12517,7 +12517,7 @@
                 <a:ea typeface="Malgun Gothic"/>
                 <a:cs typeface="Malgun Gothic"/>
               </a:rPr>
-              <a:t>계정 항목(HanwhaSystems · 사번)을 확인하게 한다.</a:t>
+              <a:t>계정 항목(가상 ICT 기업 · 사번)을 확인하게 한다.</a:t>
             </a:r>
           </a:p>
         </p:txBody>
@@ -12932,7 +12932,7 @@
                 <a:ea typeface="Malgun Gothic"/>
                 <a:cs typeface="Malgun Gothic"/>
               </a:rPr>
-              <a:t>© HANWHA SYSTEMS ICT · IT-ACC-003-M · 사내 제한</a:t>
+              <a:t>© 가상 ICT 기업 · IT-ACC-003-M · 사내 제한</a:t>
             </a:r>
           </a:p>
         </p:txBody>
@@ -13857,7 +13857,7 @@
                 <a:ea typeface="Malgun Gothic"/>
                 <a:cs typeface="Malgun Gothic"/>
               </a:rPr>
-              <a:t>© HANWHA SYSTEMS ICT · IT-ACC-003-M · 사내 제한</a:t>
+              <a:t>© 가상 ICT 기업 · IT-ACC-003-M · 사내 제한</a:t>
             </a:r>
           </a:p>
         </p:txBody>
@@ -16372,7 +16372,7 @@
                 <a:ea typeface="Malgun Gothic"/>
                 <a:cs typeface="Malgun Gothic"/>
               </a:rPr>
-              <a:t>© HANWHA SYSTEMS ICT · IT-ACC-003-M · 사내 제한</a:t>
+              <a:t>© 가상 ICT 기업 · IT-ACC-003-M · 사내 제한</a:t>
             </a:r>
           </a:p>
         </p:txBody>
@@ -17568,7 +17568,7 @@
                 <a:ea typeface="Malgun Gothic"/>
                 <a:cs typeface="Malgun Gothic"/>
               </a:rPr>
-              <a:t>© HANWHA SYSTEMS ICT · IT-ACC-003-M · 사내 제한</a:t>
+              <a:t>© 가상 ICT 기업 · IT-ACC-003-M · 사내 제한</a:t>
             </a:r>
           </a:p>
         </p:txBody>
@@ -19686,7 +19686,7 @@
                 <a:ea typeface="Malgun Gothic"/>
                 <a:cs typeface="Malgun Gothic"/>
               </a:rPr>
-              <a:t>© HANWHA SYSTEMS ICT · IT-ACC-003-M · 사내 제한</a:t>
+              <a:t>© 가상 ICT 기업 · IT-ACC-003-M · 사내 제한</a:t>
             </a:r>
           </a:p>
         </p:txBody>
@@ -20758,7 +20758,7 @@
                 <a:ea typeface="Malgun Gothic"/>
                 <a:cs typeface="Malgun Gothic"/>
               </a:rPr>
-              <a:t>© HANWHA SYSTEMS ICT · IT-ACC-003-M · 사내 제한</a:t>
+              <a:t>© 가상 ICT 기업 · IT-ACC-003-M · 사내 제한</a:t>
             </a:r>
           </a:p>
         </p:txBody>
@@ -22401,7 +22401,7 @@
                 <a:ea typeface="Malgun Gothic"/>
                 <a:cs typeface="Malgun Gothic"/>
               </a:rPr>
-              <a:t>© HANWHA SYSTEMS ICT · IT-ACC-003-M · 사내 제한</a:t>
+              <a:t>© 가상 ICT 기업 · IT-ACC-003-M · 사내 제한</a:t>
             </a:r>
           </a:p>
         </p:txBody>
@@ -23420,7 +23420,7 @@
                 <a:ea typeface="Malgun Gothic"/>
                 <a:cs typeface="Malgun Gothic"/>
               </a:rPr>
-              <a:t>© HANWHA SYSTEMS ICT · IT-ACC-003-M · 사내 제한</a:t>
+              <a:t>© 가상 ICT 기업 · IT-ACC-003-M · 사내 제한</a:t>
             </a:r>
           </a:p>
         </p:txBody>
@@ -23668,7 +23668,7 @@
                 <a:ea typeface="Malgun Gothic"/>
                 <a:cs typeface="Malgun Gothic"/>
               </a:rPr>
-              <a:t>© HANWHA SYSTEMS ICT · IT-ACC-003-M · 사내 제한</a:t>
+              <a:t>© 가상 ICT 기업 · IT-ACC-003-M · 사내 제한</a:t>
             </a:r>
           </a:p>
         </p:txBody>
@@ -24465,7 +24465,7 @@
                 <a:ea typeface="Malgun Gothic"/>
                 <a:cs typeface="Malgun Gothic"/>
               </a:rPr>
-              <a:t>© HANWHA SYSTEMS ICT · IT-ACC-003-M · 사내 제한</a:t>
+              <a:t>© 가상 ICT 기업 · IT-ACC-003-M · 사내 제한</a:t>
             </a:r>
           </a:p>
         </p:txBody>
@@ -24713,7 +24713,7 @@
                 <a:ea typeface="Malgun Gothic"/>
                 <a:cs typeface="Malgun Gothic"/>
               </a:rPr>
-              <a:t>© HANWHA SYSTEMS ICT · IT-ACC-003-M · 사내 제한</a:t>
+              <a:t>© 가상 ICT 기업 · IT-ACC-003-M · 사내 제한</a:t>
             </a:r>
           </a:p>
         </p:txBody>
@@ -25853,7 +25853,7 @@
                 <a:ea typeface="Malgun Gothic"/>
                 <a:cs typeface="Malgun Gothic"/>
               </a:rPr>
-              <a:t>© HANWHA SYSTEMS ICT · IT-ACC-003-M · 사내 제한</a:t>
+              <a:t>© 가상 ICT 기업 · IT-ACC-003-M · 사내 제한</a:t>
             </a:r>
           </a:p>
         </p:txBody>
@@ -26101,7 +26101,7 @@
                 <a:ea typeface="Malgun Gothic"/>
                 <a:cs typeface="Malgun Gothic"/>
               </a:rPr>
-              <a:t>© HANWHA SYSTEMS ICT · IT-ACC-003-M · 사내 제한</a:t>
+              <a:t>© 가상 ICT 기업 · IT-ACC-003-M · 사내 제한</a:t>
             </a:r>
           </a:p>
         </p:txBody>
@@ -27413,7 +27413,7 @@
                 <a:ea typeface="Malgun Gothic"/>
                 <a:cs typeface="Malgun Gothic"/>
               </a:rPr>
-              <a:t>© HANWHA SYSTEMS ICT · IT-ACC-003-M · 사내 제한</a:t>
+              <a:t>© 가상 ICT 기업 · IT-ACC-003-M · 사내 제한</a:t>
             </a:r>
           </a:p>
         </p:txBody>
@@ -28811,7 +28811,7 @@
                 <a:ea typeface="Malgun Gothic"/>
                 <a:cs typeface="Malgun Gothic"/>
               </a:rPr>
-              <a:t>© HANWHA SYSTEMS ICT · IT-ACC-003-M · 사내 제한</a:t>
+              <a:t>© 가상 ICT 기업 · IT-ACC-003-M · 사내 제한</a:t>
             </a:r>
           </a:p>
         </p:txBody>
@@ -29957,7 +29957,7 @@
                 <a:ea typeface="Malgun Gothic"/>
                 <a:cs typeface="Malgun Gothic"/>
               </a:rPr>
-              <a:t>© HANWHA SYSTEMS ICT · IT-ACC-003-M · 사내 제한</a:t>
+              <a:t>© 가상 ICT 기업 · IT-ACC-003-M · 사내 제한</a:t>
             </a:r>
           </a:p>
         </p:txBody>
@@ -30205,7 +30205,7 @@
                 <a:ea typeface="Malgun Gothic"/>
                 <a:cs typeface="Malgun Gothic"/>
               </a:rPr>
-              <a:t>© HANWHA SYSTEMS ICT · IT-ACC-003-M · 사내 제한</a:t>
+              <a:t>© 가상 ICT 기업 · IT-ACC-003-M · 사내 제한</a:t>
             </a:r>
           </a:p>
         </p:txBody>
@@ -31127,7 +31127,7 @@
                 <a:ea typeface="Malgun Gothic"/>
                 <a:cs typeface="Malgun Gothic"/>
               </a:rPr>
-              <a:t>© HANWHA SYSTEMS ICT · IT-ACC-003-M · 사내 제한</a:t>
+              <a:t>© 가상 ICT 기업 · IT-ACC-003-M · 사내 제한</a:t>
             </a:r>
           </a:p>
         </p:txBody>
@@ -31375,7 +31375,7 @@
                 <a:ea typeface="Malgun Gothic"/>
                 <a:cs typeface="Malgun Gothic"/>
               </a:rPr>
-              <a:t>© HANWHA SYSTEMS ICT · IT-ACC-003-M · 사내 제한</a:t>
+              <a:t>© 가상 ICT 기업 · IT-ACC-003-M · 사내 제한</a:t>
             </a:r>
           </a:p>
         </p:txBody>
@@ -34858,7 +34858,7 @@
                 <a:ea typeface="Malgun Gothic"/>
                 <a:cs typeface="Malgun Gothic"/>
               </a:rPr>
-              <a:t>© HANWHA SYSTEMS ICT · IT-ACC-003-M · 사내 제한</a:t>
+              <a:t>© 가상 ICT 기업 · IT-ACC-003-M · 사내 제한</a:t>
             </a:r>
           </a:p>
         </p:txBody>
@@ -36110,7 +36110,7 @@
                 <a:ea typeface="Malgun Gothic"/>
                 <a:cs typeface="Malgun Gothic"/>
               </a:rPr>
-              <a:t>© HANWHA SYSTEMS ICT · IT-ACC-003-M · 사내 제한</a:t>
+              <a:t>© 가상 ICT 기업 · IT-ACC-003-M · 사내 제한</a:t>
             </a:r>
           </a:p>
         </p:txBody>
@@ -36555,7 +36555,7 @@
                 <a:ea typeface="Malgun Gothic"/>
                 <a:cs typeface="Malgun Gothic"/>
               </a:rPr>
-              <a:t>© HANWHA SYSTEMS ICT · IT-ACC-003-M · 사내 제한</a:t>
+              <a:t>© 가상 ICT 기업 · IT-ACC-003-M · 사내 제한</a:t>
             </a:r>
           </a:p>
         </p:txBody>
